--- a/report/qbr-template.pptx
+++ b/report/qbr-template.pptx
@@ -954,9 +954,6 @@
       <a:endParaRPr lang="ko-KR"/>
     </a:p>
   </c:txPr>
-  <c:externalData r:id="rId4">
-    <c:autoUpdate val="0"/>
-  </c:externalData>
 </c:chartSpace>
 </file>
 
@@ -1497,9 +1494,6 @@
       <a:endParaRPr lang="ko-KR"/>
     </a:p>
   </c:txPr>
-  <c:externalData r:id="rId4">
-    <c:autoUpdate val="0"/>
-  </c:externalData>
 </c:chartSpace>
 </file>
 
@@ -2130,9 +2124,6 @@
       <a:endParaRPr lang="ko-KR"/>
     </a:p>
   </c:txPr>
-  <c:externalData r:id="rId4">
-    <c:autoUpdate val="0"/>
-  </c:externalData>
 </c:chartSpace>
 </file>
 
@@ -3132,9 +3123,6 @@
       <a:endParaRPr lang="ko-KR"/>
     </a:p>
   </c:txPr>
-  <c:externalData r:id="rId4">
-    <c:autoUpdate val="0"/>
-  </c:externalData>
 </c:chartSpace>
 </file>
 
@@ -3762,9 +3750,6 @@
       <a:endParaRPr lang="ko-KR"/>
     </a:p>
   </c:txPr>
-  <c:externalData r:id="rId4">
-    <c:autoUpdate val="0"/>
-  </c:externalData>
 </c:chartSpace>
 </file>
 
@@ -4595,9 +4580,6 @@
       <a:endParaRPr lang="ko-KR"/>
     </a:p>
   </c:txPr>
-  <c:externalData r:id="rId4">
-    <c:autoUpdate val="0"/>
-  </c:externalData>
 </c:chartSpace>
 </file>
 
@@ -5346,9 +5328,6 @@
       <a:endParaRPr lang="ko-KR"/>
     </a:p>
   </c:txPr>
-  <c:externalData r:id="rId4">
-    <c:autoUpdate val="0"/>
-  </c:externalData>
 </c:chartSpace>
 </file>
 
@@ -6096,9 +6075,6 @@
       <a:endParaRPr lang="ko-KR"/>
     </a:p>
   </c:txPr>
-  <c:externalData r:id="rId4">
-    <c:autoUpdate val="0"/>
-  </c:externalData>
 </c:chartSpace>
 </file>
 
